--- a/slides/09_functions.pptx
+++ b/slides/09_functions.pptx
@@ -6328,8 +6328,6 @@
               <a:rPr/>
               <a:t>R 기초 프로그래밍</a:t>
             </a:r>
-            <a:br/>
-            <a:br/>
           </a:p>
         </p:txBody>
       </p:sp>
